--- a/system-design-101/vi/lessons/sd-04-028/slides/sd-04-028.pptx
+++ b/system-design-101/vi/lessons/sd-04-028/slides/sd-04-028.pptx
@@ -3106,7 +3106,7 @@
               <a:buNone/>
             </a:pPr>
             <a:r>
-              <a:rPr lang="en-US" sz="7800" dirty="0" spc="-4" kern="0">
+              <a:rPr lang="en-US" sz="7800" dirty="0" spc="-20" kern="0">
                 <a:solidFill>
                   <a:srgbClr val="14161C"/>
                 </a:solidFill>
@@ -3114,10 +3114,10 @@
                 <a:ea typeface="Bricolage Grotesque ExtraBold" pitchFamily="34" charset="-122"/>
                 <a:cs typeface="Bricolage Grotesque ExtraBold" pitchFamily="34" charset="-120"/>
               </a:rPr>
-              <a:t>Phần</a:t>
-            </a:r>
-            <a:r>
-              <a:rPr lang="en-US" sz="7800" dirty="0" spc="-3" kern="0">
+              <a:t>Tính</a:t>
+            </a:r>
+            <a:r>
+              <a:rPr lang="en-US" sz="7800" dirty="0" spc="-39" kern="0">
                 <a:solidFill>
                   <a:srgbClr val="14161C"/>
                 </a:solidFill>
@@ -3125,10 +3125,10 @@
                 <a:ea typeface="Bricolage Grotesque ExtraBold" pitchFamily="34" charset="-122"/>
                 <a:cs typeface="Bricolage Grotesque ExtraBold" pitchFamily="34" charset="-120"/>
               </a:rPr>
-              <a:t> tính</a:t>
-            </a:r>
-            <a:r>
-              <a:rPr lang="en-US" sz="7800" dirty="0" spc="-39" kern="0">
+              <a:t> toán</a:t>
+            </a:r>
+            <a:r>
+              <a:rPr lang="en-US" sz="7800" dirty="0" spc="-4" kern="0">
                 <a:solidFill>
                   <a:srgbClr val="14161C"/>
                 </a:solidFill>
@@ -3136,10 +3136,10 @@
                 <a:ea typeface="Bricolage Grotesque ExtraBold" pitchFamily="34" charset="-122"/>
                 <a:cs typeface="Bricolage Grotesque ExtraBold" pitchFamily="34" charset="-120"/>
               </a:rPr>
-              <a:t> toán</a:t>
-            </a:r>
-            <a:r>
-              <a:rPr lang="en-US" sz="7800" dirty="0" spc="-4" kern="0">
+              <a:t> mất</a:t>
+            </a:r>
+            <a:r>
+              <a:rPr lang="en-US" sz="7800" dirty="0" spc="29" kern="0">
                 <a:solidFill>
                   <a:srgbClr val="14161C"/>
                 </a:solidFill>
@@ -3147,10 +3147,10 @@
                 <a:ea typeface="Bricolage Grotesque ExtraBold" pitchFamily="34" charset="-122"/>
                 <a:cs typeface="Bricolage Grotesque ExtraBold" pitchFamily="34" charset="-120"/>
               </a:rPr>
-              <a:t> mất</a:t>
-            </a:r>
-            <a:r>
-              <a:rPr lang="en-US" sz="7800" dirty="0" spc="29" kern="0">
+              <a:t> đi,</a:t>
+            </a:r>
+            <a:r>
+              <a:rPr lang="en-US" sz="7800" dirty="0" spc="-3" kern="0">
                 <a:solidFill>
                   <a:srgbClr val="14161C"/>
                 </a:solidFill>
@@ -3158,10 +3158,10 @@
                 <a:ea typeface="Bricolage Grotesque ExtraBold" pitchFamily="34" charset="-122"/>
                 <a:cs typeface="Bricolage Grotesque ExtraBold" pitchFamily="34" charset="-120"/>
               </a:rPr>
-              <a:t> đi,</a:t>
-            </a:r>
-            <a:r>
-              <a:rPr lang="en-US" sz="7800" dirty="0" spc="-3" kern="0">
+              <a:t> sinh</a:t>
+            </a:r>
+            <a:r>
+              <a:rPr lang="en-US" sz="7800" dirty="0" spc="12" kern="0">
                 <a:solidFill>
                   <a:srgbClr val="14161C"/>
                 </a:solidFill>
@@ -3169,10 +3169,10 @@
                 <a:ea typeface="Bricolage Grotesque ExtraBold" pitchFamily="34" charset="-122"/>
                 <a:cs typeface="Bricolage Grotesque ExtraBold" pitchFamily="34" charset="-120"/>
               </a:rPr>
-              <a:t> sinh</a:t>
-            </a:r>
-            <a:r>
-              <a:rPr lang="en-US" sz="7800" dirty="0" spc="12" kern="0">
+              <a:t> lại;</a:t>
+            </a:r>
+            <a:r>
+              <a:rPr lang="en-US" sz="7800" dirty="0" spc="2" kern="0">
                 <a:solidFill>
                   <a:srgbClr val="14161C"/>
                 </a:solidFill>
@@ -3180,10 +3180,10 @@
                 <a:ea typeface="Bricolage Grotesque ExtraBold" pitchFamily="34" charset="-122"/>
                 <a:cs typeface="Bricolage Grotesque ExtraBold" pitchFamily="34" charset="-120"/>
               </a:rPr>
-              <a:t> lại;</a:t>
-            </a:r>
-            <a:r>
-              <a:rPr lang="en-US" sz="7800" dirty="0" spc="1" kern="0">
+              <a:t> dữ</a:t>
+            </a:r>
+            <a:r>
+              <a:rPr lang="en-US" sz="7800" dirty="0" spc="3" kern="0">
                 <a:solidFill>
                   <a:srgbClr val="14161C"/>
                 </a:solidFill>
@@ -3191,10 +3191,10 @@
                 <a:ea typeface="Bricolage Grotesque ExtraBold" pitchFamily="34" charset="-122"/>
                 <a:cs typeface="Bricolage Grotesque ExtraBold" pitchFamily="34" charset="-120"/>
               </a:rPr>
-              <a:t> dữ</a:t>
-            </a:r>
-            <a:r>
-              <a:rPr lang="en-US" sz="7800" dirty="0" spc="3" kern="0">
+              <a:t> liệu</a:t>
+            </a:r>
+            <a:r>
+              <a:rPr lang="en-US" sz="7800" dirty="0" spc="-66" kern="0">
                 <a:solidFill>
                   <a:srgbClr val="14161C"/>
                 </a:solidFill>
@@ -3202,21 +3202,10 @@
                 <a:ea typeface="Bricolage Grotesque ExtraBold" pitchFamily="34" charset="-122"/>
                 <a:cs typeface="Bricolage Grotesque ExtraBold" pitchFamily="34" charset="-120"/>
               </a:rPr>
-              <a:t> liệu</a:t>
-            </a:r>
-            <a:r>
-              <a:rPr lang="en-US" sz="7800" dirty="0" spc="-65" kern="0">
-                <a:solidFill>
-                  <a:srgbClr val="14161C"/>
-                </a:solidFill>
-                <a:latin typeface="Bricolage Grotesque ExtraBold" pitchFamily="34" charset="0"/>
-                <a:ea typeface="Bricolage Grotesque ExtraBold" pitchFamily="34" charset="-122"/>
-                <a:cs typeface="Bricolage Grotesque ExtraBold" pitchFamily="34" charset="-120"/>
-              </a:rPr>
               <a:t> vẫn</a:t>
             </a:r>
             <a:r>
-              <a:rPr lang="en-US" sz="7800" dirty="0" spc="-3" kern="0">
+              <a:rPr lang="en-US" sz="7800" dirty="0" spc="-2" kern="0">
                 <a:solidFill>
                   <a:srgbClr val="14161C"/>
                 </a:solidFill>
@@ -3429,37 +3418,15 @@
               <a:buNone/>
             </a:pPr>
             <a:r>
-              <a:rPr lang="en-US" sz="2550" dirty="0" spc="-1" kern="0">
-                <a:solidFill>
-                  <a:srgbClr val="14161C"/>
-                </a:solidFill>
-                <a:latin typeface="Be Vietnam Pro" pitchFamily="34" charset="0"/>
-                <a:ea typeface="Be Vietnam Pro" pitchFamily="34" charset="-122"/>
-                <a:cs typeface="Be Vietnam Pro" pitchFamily="34" charset="-120"/>
-              </a:rPr>
-              <a:t>Dịch</a:t>
-            </a:r>
-            <a:r>
-              <a:rPr lang="en-US" sz="2550" dirty="0" spc="-4" kern="0">
-                <a:solidFill>
-                  <a:srgbClr val="14161C"/>
-                </a:solidFill>
-                <a:latin typeface="Be Vietnam Pro" pitchFamily="34" charset="0"/>
-                <a:ea typeface="Be Vietnam Pro" pitchFamily="34" charset="-122"/>
-                <a:cs typeface="Be Vietnam Pro" pitchFamily="34" charset="-120"/>
-              </a:rPr>
-              <a:t> vụ</a:t>
-            </a:r>
-            <a:r>
-              <a:rPr lang="en-US" sz="2550" dirty="0" spc="-1" kern="0">
-                <a:solidFill>
-                  <a:srgbClr val="14161C"/>
-                </a:solidFill>
-                <a:latin typeface="Be Vietnam Pro" pitchFamily="34" charset="0"/>
-                <a:ea typeface="Be Vietnam Pro" pitchFamily="34" charset="-122"/>
-                <a:cs typeface="Be Vietnam Pro" pitchFamily="34" charset="-120"/>
-              </a:rPr>
-              <a:t> tự</a:t>
+              <a:rPr lang="en-US" sz="2550" dirty="0" spc="-133" kern="0">
+                <a:solidFill>
+                  <a:srgbClr val="14161C"/>
+                </a:solidFill>
+                <a:latin typeface="Be Vietnam Pro" pitchFamily="34" charset="0"/>
+                <a:ea typeface="Be Vietnam Pro" pitchFamily="34" charset="-122"/>
+                <a:cs typeface="Be Vietnam Pro" pitchFamily="34" charset="-120"/>
+              </a:rPr>
+              <a:t>Tự</a:t>
             </a:r>
             <a:r>
               <a:rPr lang="en-US" sz="2550" dirty="0" spc="-9" kern="0">
@@ -3495,7 +3462,7 @@
               <a:t> theo</a:t>
             </a:r>
             <a:r>
-              <a:rPr lang="en-US" sz="2550" dirty="0" spc="-9" kern="0">
+              <a:rPr lang="en-US" sz="2550" dirty="0" spc="-10" kern="0">
                 <a:solidFill>
                   <a:srgbClr val="14161C"/>
                 </a:solidFill>
@@ -3506,7 +3473,7 @@
               <a:t> tải,</a:t>
             </a:r>
             <a:r>
-              <a:rPr lang="en-US" sz="2550" dirty="0" spc="-38" kern="0">
+              <a:rPr lang="en-US" sz="2550" dirty="0" spc="-36" kern="0">
                 <a:solidFill>
                   <a:srgbClr val="14161C"/>
                 </a:solidFill>
@@ -5444,7 +5411,7 @@
                 <a:ea typeface="Be Vietnam Pro" pitchFamily="34" charset="-122"/>
                 <a:cs typeface="Be Vietnam Pro" pitchFamily="34" charset="-120"/>
               </a:rPr>
-              <a:t> tới</a:t>
+              <a:t> tới máy</a:t>
             </a:r>
             <a:r>
               <a:rPr lang="en-US" sz="2250" dirty="0" spc="1" kern="0">
@@ -5455,7 +5422,7 @@
                 <a:ea typeface="Be Vietnam Pro" pitchFamily="34" charset="-122"/>
                 <a:cs typeface="Be Vietnam Pro" pitchFamily="34" charset="-120"/>
               </a:rPr>
-              <a:t> nhóm</a:t>
+              <a:t> giữ</a:t>
             </a:r>
             <a:r>
               <a:rPr lang="en-US" sz="2250" dirty="0" spc="-9" kern="0">
@@ -5466,32 +5433,10 @@
                 <a:ea typeface="Be Vietnam Pro" pitchFamily="34" charset="-122"/>
                 <a:cs typeface="Be Vietnam Pro" pitchFamily="34" charset="-120"/>
               </a:rPr>
-              <a:t> máy</a:t>
-            </a:r>
-            <a:r>
-              <a:rPr lang="en-US" sz="2250" dirty="0" spc="0" kern="0">
-                <a:solidFill>
-                  <a:srgbClr val="14161C"/>
-                </a:solidFill>
-                <a:latin typeface="Be Vietnam Pro" pitchFamily="34" charset="0"/>
-                <a:ea typeface="Be Vietnam Pro" pitchFamily="34" charset="-122"/>
-                <a:cs typeface="Be Vietnam Pro" pitchFamily="34" charset="-120"/>
-              </a:rPr>
-              <a:t> giữ</a:t>
-            </a:r>
-            <a:r>
-              <a:rPr lang="en-US" sz="2250" dirty="0" spc="-9" kern="0">
-                <a:solidFill>
-                  <a:srgbClr val="14161C"/>
-                </a:solidFill>
-                <a:latin typeface="Be Vietnam Pro" pitchFamily="34" charset="0"/>
-                <a:ea typeface="Be Vietnam Pro" pitchFamily="34" charset="-122"/>
-                <a:cs typeface="Be Vietnam Pro" pitchFamily="34" charset="-120"/>
-              </a:rPr>
               <a:t> nhật</a:t>
             </a:r>
             <a:r>
-              <a:rPr lang="en-US" sz="2250" dirty="0" spc="3" kern="0">
+              <a:rPr lang="en-US" sz="2250" dirty="0" spc="2" kern="0">
                 <a:solidFill>
                   <a:srgbClr val="14161C"/>
                 </a:solidFill>
@@ -8493,18 +8438,7 @@
               <a:t> bảng:</a:t>
             </a:r>
             <a:r>
-              <a:rPr lang="en-US" sz="2250" dirty="0" spc="13" kern="0">
-                <a:solidFill>
-                  <a:srgbClr val="14161C"/>
-                </a:solidFill>
-                <a:latin typeface="Be Vietnam Pro" pitchFamily="34" charset="0"/>
-                <a:ea typeface="Be Vietnam Pro" pitchFamily="34" charset="-122"/>
-                <a:cs typeface="Be Vietnam Pro" pitchFamily="34" charset="-120"/>
-              </a:rPr>
-              <a:t> đọc</a:t>
-            </a:r>
-            <a:r>
-              <a:rPr lang="en-US" sz="2250" dirty="0" spc="-7" kern="0">
+              <a:rPr lang="en-US" sz="2250" dirty="0" spc="-6" kern="0">
                 <a:solidFill>
                   <a:srgbClr val="14161C"/>
                 </a:solidFill>
@@ -8526,7 +8460,7 @@
               <a:t> trang.</a:t>
             </a:r>
             <a:r>
-              <a:rPr lang="en-US" sz="2250" dirty="0" spc="-63" kern="0">
+              <a:rPr lang="en-US" sz="2250" dirty="0" spc="-64" kern="0">
                 <a:solidFill>
                   <a:srgbClr val="14161C"/>
                 </a:solidFill>
@@ -8537,7 +8471,7 @@
               <a:t> Tra</a:t>
             </a:r>
             <a:r>
-              <a:rPr lang="en-US" sz="2250" dirty="0" spc="-4" kern="0">
+              <a:rPr lang="en-US" sz="2250" dirty="0" spc="-3" kern="0">
                 <a:solidFill>
                   <a:srgbClr val="14161C"/>
                 </a:solidFill>
@@ -8548,15 +8482,26 @@
               <a:t> một</a:t>
             </a:r>
             <a:r>
-              <a:rPr lang="en-US" sz="2250" dirty="0" spc="0" kern="0">
-                <a:solidFill>
-                  <a:srgbClr val="14161C"/>
-                </a:solidFill>
-                <a:latin typeface="Be Vietnam Pro" pitchFamily="34" charset="0"/>
-                <a:ea typeface="Be Vietnam Pro" pitchFamily="34" charset="-122"/>
-                <a:cs typeface="Be Vietnam Pro" pitchFamily="34" charset="-120"/>
-              </a:rPr>
-              <a:t> khóa: 4</a:t>
+              <a:rPr lang="en-US" sz="2250" dirty="0" spc="-1" kern="0">
+                <a:solidFill>
+                  <a:srgbClr val="14161C"/>
+                </a:solidFill>
+                <a:latin typeface="Be Vietnam Pro" pitchFamily="34" charset="0"/>
+                <a:ea typeface="Be Vietnam Pro" pitchFamily="34" charset="-122"/>
+                <a:cs typeface="Be Vietnam Pro" pitchFamily="34" charset="-120"/>
+              </a:rPr>
+              <a:t> khóa:</a:t>
+            </a:r>
+            <a:r>
+              <a:rPr lang="en-US" sz="2250" dirty="0" spc="2" kern="0">
+                <a:solidFill>
+                  <a:srgbClr val="14161C"/>
+                </a:solidFill>
+                <a:latin typeface="Be Vietnam Pro" pitchFamily="34" charset="0"/>
+                <a:ea typeface="Be Vietnam Pro" pitchFamily="34" charset="-122"/>
+                <a:cs typeface="Be Vietnam Pro" pitchFamily="34" charset="-120"/>
+              </a:rPr>
+              <a:t> 4</a:t>
             </a:r>
             <a:r>
               <a:rPr lang="en-US" sz="2250" dirty="0" spc="-13" kern="0">
@@ -9428,18 +9373,51 @@
               <a:buNone/>
             </a:pPr>
             <a:r>
-              <a:rPr lang="en-US" sz="2850" dirty="0" spc="-97" kern="0">
-                <a:solidFill>
-                  <a:srgbClr val="F3EEE3"/>
-                </a:solidFill>
-                <a:latin typeface="Be Vietnam Pro" pitchFamily="34" charset="0"/>
-                <a:ea typeface="Be Vietnam Pro" pitchFamily="34" charset="-122"/>
-                <a:cs typeface="Be Vietnam Pro" pitchFamily="34" charset="-120"/>
-              </a:rPr>
-              <a:t>Yêu</a:t>
-            </a:r>
-            <a:r>
-              <a:rPr lang="en-US" sz="2850" dirty="0" spc="0" kern="0">
+              <a:rPr lang="en-US" sz="2850" dirty="0" spc="1" kern="0">
+                <a:solidFill>
+                  <a:srgbClr val="F3EEE3"/>
+                </a:solidFill>
+                <a:latin typeface="Be Vietnam Pro" pitchFamily="34" charset="0"/>
+                <a:ea typeface="Be Vietnam Pro" pitchFamily="34" charset="-122"/>
+                <a:cs typeface="Be Vietnam Pro" pitchFamily="34" charset="-120"/>
+              </a:rPr>
+              <a:t>Sau</a:t>
+            </a:r>
+            <a:r>
+              <a:rPr lang="en-US" sz="2850" dirty="0" spc="-16" kern="0">
+                <a:solidFill>
+                  <a:srgbClr val="F3EEE3"/>
+                </a:solidFill>
+                <a:latin typeface="Be Vietnam Pro" pitchFamily="34" charset="0"/>
+                <a:ea typeface="Be Vietnam Pro" pitchFamily="34" charset="-122"/>
+                <a:cs typeface="Be Vietnam Pro" pitchFamily="34" charset="-120"/>
+              </a:rPr>
+              <a:t> tạm</a:t>
+            </a:r>
+            <a:r>
+              <a:rPr lang="en-US" sz="2850" dirty="0" spc="17" kern="0">
+                <a:solidFill>
+                  <a:srgbClr val="F3EEE3"/>
+                </a:solidFill>
+                <a:latin typeface="Be Vietnam Pro" pitchFamily="34" charset="0"/>
+                <a:ea typeface="Be Vietnam Pro" pitchFamily="34" charset="-122"/>
+                <a:cs typeface="Be Vietnam Pro" pitchFamily="34" charset="-120"/>
+              </a:rPr>
+              <a:t> dừng,</a:t>
+            </a:r>
+            <a:r>
+              <a:rPr lang="en-US" sz="2850" dirty="0" spc="-24" kern="0">
+                <a:solidFill>
+                  <a:srgbClr val="F3EEE3"/>
+                </a:solidFill>
+                <a:latin typeface="Be Vietnam Pro" pitchFamily="34" charset="0"/>
+                <a:ea typeface="Be Vietnam Pro" pitchFamily="34" charset="-122"/>
+                <a:cs typeface="Be Vietnam Pro" pitchFamily="34" charset="-120"/>
+              </a:rPr>
+              <a:t> yêu</a:t>
+            </a:r>
+            <a:r>
+              <a:rPr lang="en-US" sz="2850" dirty="0" spc="1" kern="0">
                 <a:solidFill>
                   <a:srgbClr val="F3EEE3"/>
                 </a:solidFill>
@@ -9450,7 +9428,7 @@
               <a:t> cầu</a:t>
             </a:r>
             <a:r>
-              <a:rPr lang="en-US" sz="2850" dirty="0" spc="16" kern="0">
+              <a:rPr lang="en-US" sz="2850" dirty="0" spc="15" kern="0">
                 <a:solidFill>
                   <a:srgbClr val="F3EEE3"/>
                 </a:solidFill>
@@ -9461,50 +9439,6 @@
               <a:t> đầu</a:t>
             </a:r>
             <a:r>
-              <a:rPr lang="en-US" sz="2850" dirty="0" spc="-5" kern="0">
-                <a:solidFill>
-                  <a:srgbClr val="F3EEE3"/>
-                </a:solidFill>
-                <a:latin typeface="Be Vietnam Pro" pitchFamily="34" charset="0"/>
-                <a:ea typeface="Be Vietnam Pro" pitchFamily="34" charset="-122"/>
-                <a:cs typeface="Be Vietnam Pro" pitchFamily="34" charset="-120"/>
-              </a:rPr>
-              <a:t> sau</a:t>
-            </a:r>
-            <a:r>
-              <a:rPr lang="en-US" sz="2850" dirty="0" spc="-16" kern="0">
-                <a:solidFill>
-                  <a:srgbClr val="F3EEE3"/>
-                </a:solidFill>
-                <a:latin typeface="Be Vietnam Pro" pitchFamily="34" charset="0"/>
-                <a:ea typeface="Be Vietnam Pro" pitchFamily="34" charset="-122"/>
-                <a:cs typeface="Be Vietnam Pro" pitchFamily="34" charset="-120"/>
-              </a:rPr>
-              <a:t> tạm</a:t>
-            </a:r>
-            <a:r>
-              <a:rPr lang="en-US" sz="2850" dirty="0" spc="20" kern="0">
-                <a:solidFill>
-                  <a:srgbClr val="F3EEE3"/>
-                </a:solidFill>
-                <a:latin typeface="Be Vietnam Pro" pitchFamily="34" charset="0"/>
-                <a:ea typeface="Be Vietnam Pro" pitchFamily="34" charset="-122"/>
-                <a:cs typeface="Be Vietnam Pro" pitchFamily="34" charset="-120"/>
-              </a:rPr>
-              <a:t> dừng</a:t>
-            </a:r>
-            <a:r>
-              <a:rPr lang="en-US" sz="2850" dirty="0" spc="1" kern="0">
-                <a:solidFill>
-                  <a:srgbClr val="F3EEE3"/>
-                </a:solidFill>
-                <a:latin typeface="Be Vietnam Pro" pitchFamily="34" charset="0"/>
-                <a:ea typeface="Be Vietnam Pro" pitchFamily="34" charset="-122"/>
-                <a:cs typeface="Be Vietnam Pro" pitchFamily="34" charset="-120"/>
-              </a:rPr>
-              <a:t> phải</a:t>
-            </a:r>
-            <a:r>
               <a:rPr lang="en-US" sz="2850" dirty="0" spc="-1" kern="0">
                 <a:solidFill>
                   <a:srgbClr val="F3EEE3"/>
@@ -9516,7 +9450,7 @@
               <a:t> chờ tính</a:t>
             </a:r>
             <a:r>
-              <a:rPr lang="en-US" sz="2850" dirty="0" spc="-15" kern="0">
+              <a:rPr lang="en-US" sz="2850" dirty="0" spc="-14" kern="0">
                 <a:solidFill>
                   <a:srgbClr val="F3EEE3"/>
                 </a:solidFill>
@@ -9525,17 +9459,6 @@
                 <a:cs typeface="Be Vietnam Pro" pitchFamily="34" charset="-120"/>
               </a:rPr>
               <a:t> toán</a:t>
-            </a:r>
-            <a:r>
-              <a:rPr lang="en-US" sz="2850" dirty="0" spc="-8" kern="0">
-                <a:solidFill>
-                  <a:srgbClr val="F3EEE3"/>
-                </a:solidFill>
-                <a:latin typeface="Be Vietnam Pro" pitchFamily="34" charset="0"/>
-                <a:ea typeface="Be Vietnam Pro" pitchFamily="34" charset="-122"/>
-                <a:cs typeface="Be Vietnam Pro" pitchFamily="34" charset="-120"/>
-              </a:rPr>
-              <a:t> chạy</a:t>
             </a:r>
             <a:r>
               <a:rPr lang="en-US" sz="2850" dirty="0" spc="2" kern="0">
@@ -9621,17 +9544,6 @@
               <a:t> trang</a:t>
             </a:r>
             <a:r>
-              <a:rPr lang="en-US" sz="2850" dirty="0" spc="8" kern="0">
-                <a:solidFill>
-                  <a:srgbClr val="F3EEE3"/>
-                </a:solidFill>
-                <a:latin typeface="Be Vietnam Pro" pitchFamily="34" charset="0"/>
-                <a:ea typeface="Be Vietnam Pro" pitchFamily="34" charset="-122"/>
-                <a:cs typeface="Be Vietnam Pro" pitchFamily="34" charset="-120"/>
-              </a:rPr>
-              <a:t> được</a:t>
-            </a:r>
-            <a:r>
               <a:rPr lang="en-US" sz="2850" dirty="0" spc="-1" kern="0">
                 <a:solidFill>
                   <a:srgbClr val="F3EEE3"/>
@@ -9640,32 +9552,21 @@
                 <a:ea typeface="Be Vietnam Pro" pitchFamily="34" charset="-122"/>
                 <a:cs typeface="Be Vietnam Pro" pitchFamily="34" charset="-120"/>
               </a:rPr>
-              <a:t> chạm</a:t>
-            </a:r>
-            <a:r>
-              <a:rPr lang="en-US" sz="2850" dirty="0" spc="-14" kern="0">
-                <a:solidFill>
-                  <a:srgbClr val="F3EEE3"/>
-                </a:solidFill>
-                <a:latin typeface="Be Vietnam Pro" pitchFamily="34" charset="0"/>
-                <a:ea typeface="Be Vietnam Pro" pitchFamily="34" charset="-122"/>
-                <a:cs typeface="Be Vietnam Pro" pitchFamily="34" charset="-120"/>
-              </a:rPr>
-              <a:t> tới</a:t>
-            </a:r>
-            <a:r>
-              <a:rPr lang="en-US" sz="2850" dirty="0" spc="0" kern="0">
-                <a:solidFill>
-                  <a:srgbClr val="F3EEE3"/>
-                </a:solidFill>
-                <a:latin typeface="Be Vietnam Pro" pitchFamily="34" charset="0"/>
-                <a:ea typeface="Be Vietnam Pro" pitchFamily="34" charset="-122"/>
-                <a:cs typeface="Be Vietnam Pro" pitchFamily="34" charset="-120"/>
-              </a:rPr>
-              <a:t> phải</a:t>
-            </a:r>
-            <a:r>
-              <a:rPr lang="en-US" sz="2850" dirty="0" spc="10" kern="0">
+              <a:t> cần</a:t>
+            </a:r>
+            <a:r>
+              <a:rPr lang="en-US" sz="2850" dirty="0" spc="-3" kern="0">
+                <a:solidFill>
+                  <a:srgbClr val="F3EEE3"/>
+                </a:solidFill>
+                <a:latin typeface="Be Vietnam Pro" pitchFamily="34" charset="0"/>
+                <a:ea typeface="Be Vietnam Pro" pitchFamily="34" charset="-122"/>
+                <a:cs typeface="Be Vietnam Pro" pitchFamily="34" charset="-120"/>
+              </a:rPr>
+              <a:t> dùng</a:t>
+            </a:r>
+            <a:r>
+              <a:rPr lang="en-US" sz="2850" dirty="0" spc="11" kern="0">
                 <a:solidFill>
                   <a:srgbClr val="F3EEE3"/>
                 </a:solidFill>
@@ -9748,6 +9649,17 @@
               <a:t>Tải</a:t>
             </a:r>
             <a:r>
+              <a:rPr lang="en-US" sz="2850" dirty="0" spc="0" kern="0">
+                <a:solidFill>
+                  <a:srgbClr val="F3EEE3"/>
+                </a:solidFill>
+                <a:latin typeface="Be Vietnam Pro" pitchFamily="34" charset="0"/>
+                <a:ea typeface="Be Vietnam Pro" pitchFamily="34" charset="-122"/>
+                <a:cs typeface="Be Vietnam Pro" pitchFamily="34" charset="-120"/>
+              </a:rPr>
+              <a:t> luôn</a:t>
+            </a:r>
+            <a:r>
               <a:rPr lang="en-US" sz="2850" dirty="0" spc="12" kern="0">
                 <a:solidFill>
                   <a:srgbClr val="F3EEE3"/>
@@ -9756,18 +9668,51 @@
                 <a:ea typeface="Be Vietnam Pro" pitchFamily="34" charset="-122"/>
                 <a:cs typeface="Be Vietnam Pro" pitchFamily="34" charset="-120"/>
               </a:rPr>
-              <a:t> đều,</a:t>
-            </a:r>
-            <a:r>
-              <a:rPr lang="en-US" sz="2850" dirty="0" spc="1" kern="0">
-                <a:solidFill>
-                  <a:srgbClr val="F3EEE3"/>
-                </a:solidFill>
-                <a:latin typeface="Be Vietnam Pro" pitchFamily="34" charset="0"/>
-                <a:ea typeface="Be Vietnam Pro" pitchFamily="34" charset="-122"/>
-                <a:cs typeface="Be Vietnam Pro" pitchFamily="34" charset="-120"/>
-              </a:rPr>
-              <a:t> liên</a:t>
+              <a:t> đều:</a:t>
+            </a:r>
+            <a:r>
+              <a:rPr lang="en-US" sz="2850" dirty="0" spc="-11" kern="0">
+                <a:solidFill>
+                  <a:srgbClr val="F3EEE3"/>
+                </a:solidFill>
+                <a:latin typeface="Be Vietnam Pro" pitchFamily="34" charset="0"/>
+                <a:ea typeface="Be Vietnam Pro" pitchFamily="34" charset="-122"/>
+                <a:cs typeface="Be Vietnam Pro" pitchFamily="34" charset="-120"/>
+              </a:rPr>
+              <a:t> máy</a:t>
+            </a:r>
+            <a:r>
+              <a:rPr lang="en-US" sz="2850" dirty="0" spc="0" kern="0">
+                <a:solidFill>
+                  <a:srgbClr val="F3EEE3"/>
+                </a:solidFill>
+                <a:latin typeface="Be Vietnam Pro" pitchFamily="34" charset="0"/>
+                <a:ea typeface="Be Vietnam Pro" pitchFamily="34" charset="-122"/>
+                <a:cs typeface="Be Vietnam Pro" pitchFamily="34" charset="-120"/>
+              </a:rPr>
+              <a:t> cố</a:t>
+            </a:r>
+            <a:r>
+              <a:rPr lang="en-US" sz="2850" dirty="0" spc="22" kern="0">
+                <a:solidFill>
+                  <a:srgbClr val="F3EEE3"/>
+                </a:solidFill>
+                <a:latin typeface="Be Vietnam Pro" pitchFamily="34" charset="0"/>
+                <a:ea typeface="Be Vietnam Pro" pitchFamily="34" charset="-122"/>
+                <a:cs typeface="Be Vietnam Pro" pitchFamily="34" charset="-120"/>
+              </a:rPr>
+              <a:t> định</a:t>
+            </a:r>
+            <a:r>
+              <a:rPr lang="en-US" sz="2850" dirty="0" spc="0" kern="0">
+                <a:solidFill>
+                  <a:srgbClr val="F3EEE3"/>
+                </a:solidFill>
+                <a:latin typeface="Be Vietnam Pro" pitchFamily="34" charset="0"/>
+                <a:ea typeface="Be Vietnam Pro" pitchFamily="34" charset="-122"/>
+                <a:cs typeface="Be Vietnam Pro" pitchFamily="34" charset="-120"/>
+              </a:rPr>
+              <a:t> có</a:t>
             </a:r>
             <a:r>
               <a:rPr lang="en-US" sz="2850" dirty="0" spc="-1" kern="0">
@@ -9778,51 +9723,7 @@
                 <a:ea typeface="Be Vietnam Pro" pitchFamily="34" charset="-122"/>
                 <a:cs typeface="Be Vietnam Pro" pitchFamily="34" charset="-120"/>
               </a:rPr>
-              <a:t> tục:</a:t>
-            </a:r>
-            <a:r>
-              <a:rPr lang="en-US" sz="2850" dirty="0" spc="-11" kern="0">
-                <a:solidFill>
-                  <a:srgbClr val="F3EEE3"/>
-                </a:solidFill>
-                <a:latin typeface="Be Vietnam Pro" pitchFamily="34" charset="0"/>
-                <a:ea typeface="Be Vietnam Pro" pitchFamily="34" charset="-122"/>
-                <a:cs typeface="Be Vietnam Pro" pitchFamily="34" charset="-120"/>
-              </a:rPr>
-              <a:t> máy</a:t>
-            </a:r>
-            <a:r>
-              <a:rPr lang="en-US" sz="2850" dirty="0" spc="-1" kern="0">
-                <a:solidFill>
-                  <a:srgbClr val="F3EEE3"/>
-                </a:solidFill>
-                <a:latin typeface="Be Vietnam Pro" pitchFamily="34" charset="0"/>
-                <a:ea typeface="Be Vietnam Pro" pitchFamily="34" charset="-122"/>
-                <a:cs typeface="Be Vietnam Pro" pitchFamily="34" charset="-120"/>
-              </a:rPr>
-              <a:t> cố</a:t>
-            </a:r>
-            <a:r>
-              <a:rPr lang="en-US" sz="2850" dirty="0" spc="23" kern="0">
-                <a:solidFill>
-                  <a:srgbClr val="F3EEE3"/>
-                </a:solidFill>
-                <a:latin typeface="Be Vietnam Pro" pitchFamily="34" charset="0"/>
-                <a:ea typeface="Be Vietnam Pro" pitchFamily="34" charset="-122"/>
-                <a:cs typeface="Be Vietnam Pro" pitchFamily="34" charset="-120"/>
-              </a:rPr>
-              <a:t> định</a:t>
-            </a:r>
-            <a:r>
-              <a:rPr lang="en-US" sz="2850" dirty="0" spc="-1" kern="0">
-                <a:solidFill>
-                  <a:srgbClr val="F3EEE3"/>
-                </a:solidFill>
-                <a:latin typeface="Be Vietnam Pro" pitchFamily="34" charset="0"/>
-                <a:ea typeface="Be Vietnam Pro" pitchFamily="34" charset="-122"/>
-                <a:cs typeface="Be Vietnam Pro" pitchFamily="34" charset="-120"/>
-              </a:rPr>
-              <a:t> có thể</a:t>
+              <a:t> thể</a:t>
             </a:r>
             <a:r>
               <a:rPr lang="en-US" sz="2850" dirty="0" spc="-35" kern="0">
@@ -9919,37 +9820,15 @@
               <a:t> trên</a:t>
             </a:r>
             <a:r>
-              <a:rPr lang="en-US" sz="2850" dirty="0" spc="-37" kern="0">
-                <a:solidFill>
-                  <a:srgbClr val="F3EEE3"/>
-                </a:solidFill>
-                <a:latin typeface="Be Vietnam Pro" pitchFamily="34" charset="0"/>
-                <a:ea typeface="Be Vietnam Pro" pitchFamily="34" charset="-122"/>
-                <a:cs typeface="Be Vietnam Pro" pitchFamily="34" charset="-120"/>
-              </a:rPr>
-              <a:t> Aurora</a:t>
-            </a:r>
-            <a:r>
-              <a:rPr lang="en-US" sz="2850" dirty="0" spc="-17" kern="0">
-                <a:solidFill>
-                  <a:srgbClr val="F3EEE3"/>
-                </a:solidFill>
-                <a:latin typeface="Be Vietnam Pro" pitchFamily="34" charset="0"/>
-                <a:ea typeface="Be Vietnam Pro" pitchFamily="34" charset="-122"/>
-                <a:cs typeface="Be Vietnam Pro" pitchFamily="34" charset="-120"/>
-              </a:rPr>
-              <a:t> và</a:t>
-            </a:r>
-            <a:r>
-              <a:rPr lang="en-US" sz="2850" dirty="0" spc="-3" kern="0">
-                <a:solidFill>
-                  <a:srgbClr val="F3EEE3"/>
-                </a:solidFill>
-                <a:latin typeface="Be Vietnam Pro" pitchFamily="34" charset="0"/>
-                <a:ea typeface="Be Vietnam Pro" pitchFamily="34" charset="-122"/>
-                <a:cs typeface="Be Vietnam Pro" pitchFamily="34" charset="-120"/>
-              </a:rPr>
-              <a:t> không</a:t>
+              <a:rPr lang="en-US" sz="2850" dirty="0" spc="-33" kern="0">
+                <a:solidFill>
+                  <a:srgbClr val="F3EEE3"/>
+                </a:solidFill>
+                <a:latin typeface="Be Vietnam Pro" pitchFamily="34" charset="0"/>
+                <a:ea typeface="Be Vietnam Pro" pitchFamily="34" charset="-122"/>
+                <a:cs typeface="Be Vietnam Pro" pitchFamily="34" charset="-120"/>
+              </a:rPr>
+              <a:t> Aurora,</a:t>
             </a:r>
             <a:r>
               <a:rPr lang="en-US" sz="2850" dirty="0" spc="-2" kern="0">
@@ -9960,7 +9839,7 @@
                 <a:ea typeface="Be Vietnam Pro" pitchFamily="34" charset="-122"/>
                 <a:cs typeface="Be Vietnam Pro" pitchFamily="34" charset="-120"/>
               </a:rPr>
-              <a:t> dùng</a:t>
+              <a:t> không dùng</a:t>
             </a:r>
             <a:r>
               <a:rPr lang="en-US" sz="2850" dirty="0" spc="-5" kern="0">
@@ -9982,7 +9861,7 @@
                 <a:ea typeface="Be Vietnam Pro" pitchFamily="34" charset="-122"/>
                 <a:cs typeface="Be Vietnam Pro" pitchFamily="34" charset="-120"/>
               </a:rPr>
-              <a:t> giá nào.</a:t>
+              <a:t> giá.</a:t>
             </a:r>
             <a:endParaRPr lang="en-US" sz="2850" dirty="0"/>
           </a:p>
@@ -10662,10 +10541,10 @@
                 <a:ea typeface="Be Vietnam Pro" pitchFamily="34" charset="-122"/>
                 <a:cs typeface="Be Vietnam Pro" pitchFamily="34" charset="-120"/>
               </a:rPr>
-              <a:t> nội bộ chỉ</a:t>
-            </a:r>
-            <a:r>
-              <a:rPr lang="en-US" sz="2250" dirty="0" spc="3" kern="0">
+              <a:t> nội</a:t>
+            </a:r>
+            <a:r>
+              <a:rPr lang="en-US" sz="2250" dirty="0" spc="2" kern="0">
                 <a:solidFill>
                   <a:srgbClr val="6B6A66"/>
                 </a:solidFill>
@@ -10673,10 +10552,10 @@
                 <a:ea typeface="Be Vietnam Pro" pitchFamily="34" charset="-122"/>
                 <a:cs typeface="Be Vietnam Pro" pitchFamily="34" charset="-120"/>
               </a:rPr>
-              <a:t> dùng</a:t>
-            </a:r>
-            <a:r>
-              <a:rPr lang="en-US" sz="2250" dirty="0" spc="-16" kern="0">
+              <a:t> bộ:</a:t>
+            </a:r>
+            <a:r>
+              <a:rPr lang="en-US" sz="2250" dirty="0" spc="0" kern="0">
                 <a:solidFill>
                   <a:srgbClr val="6B6A66"/>
                 </a:solidFill>
@@ -10684,10 +10563,10 @@
                 <a:ea typeface="Be Vietnam Pro" pitchFamily="34" charset="-122"/>
                 <a:cs typeface="Be Vietnam Pro" pitchFamily="34" charset="-120"/>
               </a:rPr>
-              <a:t> trong</a:t>
-            </a:r>
-            <a:r>
-              <a:rPr lang="en-US" sz="2250" dirty="0" spc="0" kern="0">
+              <a:t> giờ</a:t>
+            </a:r>
+            <a:r>
+              <a:rPr lang="en-US" sz="2250" dirty="0" spc="-1" kern="0">
                 <a:solidFill>
                   <a:srgbClr val="6B6A66"/>
                 </a:solidFill>
@@ -10695,10 +10574,10 @@
                 <a:ea typeface="Be Vietnam Pro" pitchFamily="34" charset="-122"/>
                 <a:cs typeface="Be Vietnam Pro" pitchFamily="34" charset="-120"/>
               </a:rPr>
-              <a:t> giờ</a:t>
-            </a:r>
-            <a:r>
-              <a:rPr lang="en-US" sz="2250" dirty="0" spc="-3" kern="0">
+              <a:t> làm</a:t>
+            </a:r>
+            <a:r>
+              <a:rPr lang="en-US" sz="2250" dirty="0" spc="5" kern="0">
                 <a:solidFill>
                   <a:srgbClr val="6B6A66"/>
                 </a:solidFill>
@@ -10706,7 +10585,29 @@
                 <a:ea typeface="Be Vietnam Pro" pitchFamily="34" charset="-122"/>
                 <a:cs typeface="Be Vietnam Pro" pitchFamily="34" charset="-120"/>
               </a:rPr>
-              <a:t> làm,</a:t>
+              <a:t> có</a:t>
+            </a:r>
+            <a:r>
+              <a:rPr lang="en-US" sz="2250" dirty="0" spc="4" kern="0">
+                <a:solidFill>
+                  <a:srgbClr val="6B6A66"/>
+                </a:solidFill>
+                <a:latin typeface="Be Vietnam Pro" pitchFamily="34" charset="0"/>
+                <a:ea typeface="Be Vietnam Pro" pitchFamily="34" charset="-122"/>
+                <a:cs typeface="Be Vietnam Pro" pitchFamily="34" charset="-120"/>
+              </a:rPr>
+              <a:t> người,</a:t>
+            </a:r>
+            <a:r>
+              <a:rPr lang="en-US" sz="2250" dirty="0" spc="10" kern="0">
+                <a:solidFill>
+                  <a:srgbClr val="6B6A66"/>
+                </a:solidFill>
+                <a:latin typeface="Be Vietnam Pro" pitchFamily="34" charset="0"/>
+                <a:ea typeface="Be Vietnam Pro" pitchFamily="34" charset="-122"/>
+                <a:cs typeface="Be Vietnam Pro" pitchFamily="34" charset="-120"/>
+              </a:rPr>
+              <a:t> đêm</a:t>
             </a:r>
             <a:r>
               <a:rPr lang="en-US" sz="2250" dirty="0" spc="2" kern="0">
@@ -10717,51 +10618,7 @@
                 <a:ea typeface="Be Vietnam Pro" pitchFamily="34" charset="-122"/>
                 <a:cs typeface="Be Vietnam Pro" pitchFamily="34" charset="-120"/>
               </a:rPr>
-              <a:t> cả</a:t>
-            </a:r>
-            <a:r>
-              <a:rPr lang="en-US" sz="2250" dirty="0" spc="11" kern="0">
-                <a:solidFill>
-                  <a:srgbClr val="6B6A66"/>
-                </a:solidFill>
-                <a:latin typeface="Be Vietnam Pro" pitchFamily="34" charset="0"/>
-                <a:ea typeface="Be Vietnam Pro" pitchFamily="34" charset="-122"/>
-                <a:cs typeface="Be Vietnam Pro" pitchFamily="34" charset="-120"/>
-              </a:rPr>
-              <a:t> đêm</a:t>
-            </a:r>
-            <a:r>
-              <a:rPr lang="en-US" sz="2250" dirty="0" spc="1" kern="0">
-                <a:solidFill>
-                  <a:srgbClr val="6B6A66"/>
-                </a:solidFill>
-                <a:latin typeface="Be Vietnam Pro" pitchFamily="34" charset="0"/>
-                <a:ea typeface="Be Vietnam Pro" pitchFamily="34" charset="-122"/>
-                <a:cs typeface="Be Vietnam Pro" pitchFamily="34" charset="-120"/>
-              </a:rPr>
-              <a:t> không</a:t>
-            </a:r>
-            <a:r>
-              <a:rPr lang="en-US" sz="2250" dirty="0" spc="-2" kern="0">
-                <a:solidFill>
-                  <a:srgbClr val="6B6A66"/>
-                </a:solidFill>
-                <a:latin typeface="Be Vietnam Pro" pitchFamily="34" charset="0"/>
-                <a:ea typeface="Be Vietnam Pro" pitchFamily="34" charset="-122"/>
-                <a:cs typeface="Be Vietnam Pro" pitchFamily="34" charset="-120"/>
-              </a:rPr>
-              <a:t> ai</a:t>
-            </a:r>
-            <a:r>
-              <a:rPr lang="en-US" sz="2250" dirty="0" spc="-10" kern="0">
-                <a:solidFill>
-                  <a:srgbClr val="6B6A66"/>
-                </a:solidFill>
-                <a:latin typeface="Be Vietnam Pro" pitchFamily="34" charset="0"/>
-                <a:ea typeface="Be Vietnam Pro" pitchFamily="34" charset="-122"/>
-                <a:cs typeface="Be Vietnam Pro" pitchFamily="34" charset="-120"/>
-              </a:rPr>
-              <a:t> vào.</a:t>
+              <a:t> không.</a:t>
             </a:r>
             <a:endParaRPr lang="en-US" sz="2250" dirty="0"/>
           </a:p>
@@ -13209,26 +13066,15 @@
               <a:t> thật:</a:t>
             </a:r>
             <a:r>
-              <a:rPr lang="en-US" sz="2400" dirty="0" spc="15" kern="0">
-                <a:solidFill>
-                  <a:srgbClr val="F3EEE3"/>
-                </a:solidFill>
-                <a:latin typeface="Be Vietnam Pro" pitchFamily="34" charset="0"/>
-                <a:ea typeface="Be Vietnam Pro" pitchFamily="34" charset="-122"/>
-                <a:cs typeface="Be Vietnam Pro" pitchFamily="34" charset="-120"/>
-              </a:rPr>
-              <a:t> lưu</a:t>
-            </a:r>
-            <a:r>
-              <a:rPr lang="en-US" sz="2400" dirty="0" spc="4" kern="0">
-                <a:solidFill>
-                  <a:srgbClr val="F3EEE3"/>
-                </a:solidFill>
-                <a:latin typeface="Be Vietnam Pro" pitchFamily="34" charset="0"/>
-                <a:ea typeface="Be Vietnam Pro" pitchFamily="34" charset="-122"/>
-                <a:cs typeface="Be Vietnam Pro" pitchFamily="34" charset="-120"/>
-              </a:rPr>
-              <a:t> trữ</a:t>
+              <a:rPr lang="en-US" sz="2400" dirty="0" spc="-1" kern="0">
+                <a:solidFill>
+                  <a:srgbClr val="F3EEE3"/>
+                </a:solidFill>
+                <a:latin typeface="Be Vietnam Pro" pitchFamily="34" charset="0"/>
+                <a:ea typeface="Be Vietnam Pro" pitchFamily="34" charset="-122"/>
+                <a:cs typeface="Be Vietnam Pro" pitchFamily="34" charset="-120"/>
+              </a:rPr>
+              <a:t> kho</a:t>
             </a:r>
             <a:r>
               <a:rPr lang="en-US" sz="2400" dirty="0" spc="1" kern="0">
@@ -13253,7 +13099,7 @@
               <a:t> mạng,</a:t>
             </a:r>
             <a:r>
-              <a:rPr lang="en-US" sz="2400" dirty="0" spc="-8" kern="0">
+              <a:rPr lang="en-US" sz="2400" dirty="0" spc="-7" kern="0">
                 <a:solidFill>
                   <a:srgbClr val="F3EEE3"/>
                 </a:solidFill>
@@ -13264,6 +13110,17 @@
               <a:t> nhật</a:t>
             </a:r>
             <a:r>
+              <a:rPr lang="en-US" sz="2400" dirty="0" spc="-2" kern="0">
+                <a:solidFill>
+                  <a:srgbClr val="F3EEE3"/>
+                </a:solidFill>
+                <a:latin typeface="Be Vietnam Pro" pitchFamily="34" charset="0"/>
+                <a:ea typeface="Be Vietnam Pro" pitchFamily="34" charset="-122"/>
+                <a:cs typeface="Be Vietnam Pro" pitchFamily="34" charset="-120"/>
+              </a:rPr>
+              <a:t> ký</a:t>
+            </a:r>
+            <a:r>
               <a:rPr lang="en-US" sz="2400" dirty="0" spc="-1" kern="0">
                 <a:solidFill>
                   <a:srgbClr val="F3EEE3"/>
@@ -13272,10 +13129,10 @@
                 <a:ea typeface="Be Vietnam Pro" pitchFamily="34" charset="-122"/>
                 <a:cs typeface="Be Vietnam Pro" pitchFamily="34" charset="-120"/>
               </a:rPr>
-              <a:t> ký nhiều</a:t>
-            </a:r>
-            <a:r>
-              <a:rPr lang="en-US" sz="2400" dirty="0" spc="-6" kern="0">
+              <a:t> nhiều</a:t>
+            </a:r>
+            <a:r>
+              <a:rPr lang="en-US" sz="2400" dirty="0" spc="-7" kern="0">
                 <a:solidFill>
                   <a:srgbClr val="F3EEE3"/>
                 </a:solidFill>

--- a/system-design-101/vi/lessons/sd-04-028/slides/sd-04-028.pptx
+++ b/system-design-101/vi/lessons/sd-04-028/slides/sd-04-028.pptx
@@ -1701,7 +1701,7 @@
         <p:spPr>
           <a:xfrm>
             <a:off x="914400" y="1428750"/>
-            <a:ext cx="9334500" cy="3429000"/>
+            <a:ext cx="9334500" cy="2286000"/>
           </a:xfrm>
           <a:prstGeom prst="rect">
             <a:avLst/>
@@ -1710,17 +1710,17 @@
           <a:ln/>
         </p:spPr>
         <p:txBody>
-          <a:bodyPr wrap="square" lIns="0" tIns="66865" rIns="0" bIns="-66865" rtlCol="0" anchor="t"/>
+          <a:bodyPr wrap="square" lIns="0" tIns="69437" rIns="0" bIns="-69437" rtlCol="0" anchor="t"/>
           <a:lstStyle/>
           <a:p>
             <a:pPr algn="l" indent="0" marL="0">
               <a:lnSpc>
-                <a:spcPts val="8190"/>
+                <a:spcPts val="8505"/>
               </a:lnSpc>
               <a:buNone/>
             </a:pPr>
             <a:r>
-              <a:rPr lang="en-US" sz="7800" dirty="0" spc="-1" kern="0">
+              <a:rPr lang="en-US" sz="8100" dirty="0" spc="-2" kern="0">
                 <a:solidFill>
                   <a:srgbClr val="F3EEE3"/>
                 </a:solidFill>
@@ -1728,10 +1728,10 @@
                 <a:ea typeface="Bricolage Grotesque ExtraBold" pitchFamily="34" charset="-122"/>
                 <a:cs typeface="Bricolage Grotesque ExtraBold" pitchFamily="34" charset="-120"/>
               </a:rPr>
-              <a:t>Cơ</a:t>
-            </a:r>
-            <a:r>
-              <a:rPr lang="en-US" sz="7800" dirty="0" spc="-2" kern="0">
+              <a:t>Cơ sở</a:t>
+            </a:r>
+            <a:r>
+              <a:rPr lang="en-US" sz="8100" dirty="0" spc="-1" kern="0">
                 <a:solidFill>
                   <a:srgbClr val="F3EEE3"/>
                 </a:solidFill>
@@ -1739,10 +1739,10 @@
                 <a:ea typeface="Bricolage Grotesque ExtraBold" pitchFamily="34" charset="-122"/>
                 <a:cs typeface="Bricolage Grotesque ExtraBold" pitchFamily="34" charset="-120"/>
               </a:rPr>
-              <a:t> sở</a:t>
-            </a:r>
-            <a:r>
-              <a:rPr lang="en-US" sz="7800" dirty="0" spc="2" kern="0">
+              <a:t> dữ</a:t>
+            </a:r>
+            <a:r>
+              <a:rPr lang="en-US" sz="8100" dirty="0" spc="2" kern="0">
                 <a:solidFill>
                   <a:srgbClr val="F3EEE3"/>
                 </a:solidFill>
@@ -1750,10 +1750,10 @@
                 <a:ea typeface="Bricolage Grotesque ExtraBold" pitchFamily="34" charset="-122"/>
                 <a:cs typeface="Bricolage Grotesque ExtraBold" pitchFamily="34" charset="-120"/>
               </a:rPr>
-              <a:t> dữ</a:t>
-            </a:r>
-            <a:r>
-              <a:rPr lang="en-US" sz="7800" dirty="0" spc="3" kern="0">
+              <a:t> liệu</a:t>
+            </a:r>
+            <a:r>
+              <a:rPr lang="en-US" sz="8100" dirty="0" spc="-13" kern="0">
                 <a:solidFill>
                   <a:srgbClr val="F3EEE3"/>
                 </a:solidFill>
@@ -1761,20 +1761,9 @@
                 <a:ea typeface="Bricolage Grotesque ExtraBold" pitchFamily="34" charset="-122"/>
                 <a:cs typeface="Bricolage Grotesque ExtraBold" pitchFamily="34" charset="-120"/>
               </a:rPr>
-              <a:t> liệu</a:t>
-            </a:r>
-            <a:r>
-              <a:rPr lang="en-US" sz="7800" dirty="0" spc="-15" kern="0">
-                <a:solidFill>
-                  <a:srgbClr val="F3EEE3"/>
-                </a:solidFill>
-                <a:latin typeface="Bricolage Grotesque ExtraBold" pitchFamily="34" charset="0"/>
-                <a:ea typeface="Bricolage Grotesque ExtraBold" pitchFamily="34" charset="-122"/>
-                <a:cs typeface="Bricolage Grotesque ExtraBold" pitchFamily="34" charset="-120"/>
-              </a:rPr>
               <a:t> serverless</a:t>
             </a:r>
-            <a:endParaRPr lang="en-US" sz="7800" dirty="0"/>
+            <a:endParaRPr lang="en-US" sz="8100" dirty="0"/>
           </a:p>
         </p:txBody>
       </p:sp>
@@ -7532,7 +7521,7 @@
               <a:buNone/>
             </a:pPr>
             <a:r>
-              <a:rPr lang="en-US" sz="6600" dirty="0" spc="13" kern="0">
+              <a:rPr lang="en-US" sz="6900" dirty="0" spc="15" kern="0">
                 <a:solidFill>
                   <a:srgbClr val="14161C"/>
                 </a:solidFill>
@@ -7543,7 +7532,7 @@
               <a:t>Dừng</a:t>
             </a:r>
             <a:r>
-              <a:rPr lang="en-US" sz="6600" dirty="0" spc="16" kern="0">
+              <a:rPr lang="en-US" sz="6900" dirty="0" spc="13" kern="0">
                 <a:solidFill>
                   <a:srgbClr val="14161C"/>
                 </a:solidFill>
@@ -7554,7 +7543,7 @@
               <a:t> A,</a:t>
             </a:r>
             <a:r>
-              <a:rPr lang="en-US" sz="6600" dirty="0" spc="-2" kern="0">
+              <a:rPr lang="en-US" sz="6900" dirty="0" spc="-1" kern="0">
                 <a:solidFill>
                   <a:srgbClr val="14161C"/>
                 </a:solidFill>
@@ -7565,7 +7554,7 @@
               <a:t> chạy</a:t>
             </a:r>
             <a:r>
-              <a:rPr lang="en-US" sz="6600" dirty="0" spc="2" kern="0">
+              <a:rPr lang="en-US" sz="6900" dirty="0" spc="-2" kern="0">
                 <a:solidFill>
                   <a:srgbClr val="14161C"/>
                 </a:solidFill>
@@ -7576,7 +7565,7 @@
               <a:t> B</a:t>
             </a:r>
             <a:r>
-              <a:rPr lang="en-US" sz="6600" dirty="0" spc="-13" kern="0">
+              <a:rPr lang="en-US" sz="6900" dirty="0" spc="-12" kern="0">
                 <a:solidFill>
                   <a:srgbClr val="14161C"/>
                 </a:solidFill>
@@ -7587,7 +7576,7 @@
               <a:t> trên</a:t>
             </a:r>
             <a:r>
-              <a:rPr lang="en-US" sz="6600" dirty="0" spc="-2" kern="0">
+              <a:rPr lang="en-US" sz="6900" dirty="0" spc="1" kern="0">
                 <a:solidFill>
                   <a:srgbClr val="14161C"/>
                 </a:solidFill>
@@ -7598,7 +7587,7 @@
               <a:t> cùng</a:t>
             </a:r>
             <a:r>
-              <a:rPr lang="en-US" sz="6600" dirty="0" spc="1" kern="0">
+              <a:rPr lang="en-US" sz="6900" dirty="0" spc="0" kern="0">
                 <a:solidFill>
                   <a:srgbClr val="14161C"/>
                 </a:solidFill>
@@ -7609,7 +7598,7 @@
               <a:t> thư</a:t>
             </a:r>
             <a:r>
-              <a:rPr lang="en-US" sz="6600" dirty="0" spc="0" kern="0">
+              <a:rPr lang="en-US" sz="6900" dirty="0" spc="-1" kern="0">
                 <a:solidFill>
                   <a:srgbClr val="14161C"/>
                 </a:solidFill>
@@ -7619,7 +7608,7 @@
               </a:rPr>
               <a:t> mục</a:t>
             </a:r>
-            <a:endParaRPr lang="en-US" sz="6600" dirty="0"/>
+            <a:endParaRPr lang="en-US" sz="6900" dirty="0"/>
           </a:p>
         </p:txBody>
       </p:sp>
@@ -10384,7 +10373,7 @@
               <a:buNone/>
             </a:pPr>
             <a:r>
-              <a:rPr lang="en-US" sz="6600" dirty="0" spc="-5" kern="0">
+              <a:rPr lang="en-US" sz="6900" dirty="0" spc="-1" kern="0">
                 <a:solidFill>
                   <a:srgbClr val="14161C"/>
                 </a:solidFill>
@@ -10395,7 +10384,7 @@
               <a:t>0</a:t>
             </a:r>
             <a:r>
-              <a:rPr lang="en-US" sz="6600" dirty="0" spc="-50" kern="0">
+              <a:rPr lang="en-US" sz="6900" dirty="0" spc="-53" kern="0">
                 <a:solidFill>
                   <a:srgbClr val="14161C"/>
                 </a:solidFill>
@@ -10406,7 +10395,7 @@
               <a:t> ACU:</a:t>
             </a:r>
             <a:r>
-              <a:rPr lang="en-US" sz="6600" dirty="0" spc="-33" kern="0">
+              <a:rPr lang="en-US" sz="6900" dirty="0" spc="-36" kern="0">
                 <a:solidFill>
                   <a:srgbClr val="14161C"/>
                 </a:solidFill>
@@ -10417,7 +10406,7 @@
               <a:t> vì</a:t>
             </a:r>
             <a:r>
-              <a:rPr lang="en-US" sz="6600" dirty="0" spc="0" kern="0">
+              <a:rPr lang="en-US" sz="6900" dirty="0" spc="0" kern="0">
                 <a:solidFill>
                   <a:srgbClr val="14161C"/>
                 </a:solidFill>
@@ -10428,7 +10417,7 @@
               <a:t> sao</a:t>
             </a:r>
             <a:r>
-              <a:rPr lang="en-US" sz="6600" dirty="0" spc="-68" kern="0">
+              <a:rPr lang="en-US" sz="6900" dirty="0" spc="-72" kern="0">
                 <a:solidFill>
                   <a:srgbClr val="14161C"/>
                 </a:solidFill>
@@ -10439,7 +10428,7 @@
               <a:t> lượt</a:t>
             </a:r>
             <a:r>
-              <a:rPr lang="en-US" sz="6600" dirty="0" spc="10" kern="0">
+              <a:rPr lang="en-US" sz="6900" dirty="0" spc="10" kern="0">
                 <a:solidFill>
                   <a:srgbClr val="14161C"/>
                 </a:solidFill>
@@ -10450,7 +10439,7 @@
               <a:t> đầu</a:t>
             </a:r>
             <a:r>
-              <a:rPr lang="en-US" sz="6600" dirty="0" spc="7" kern="0">
+              <a:rPr lang="en-US" sz="6900" dirty="0" spc="9" kern="0">
                 <a:solidFill>
                   <a:srgbClr val="14161C"/>
                 </a:solidFill>
@@ -10461,7 +10450,7 @@
               <a:t> buổi</a:t>
             </a:r>
             <a:r>
-              <a:rPr lang="en-US" sz="6600" dirty="0" spc="-1" kern="0">
+              <a:rPr lang="en-US" sz="6900" dirty="0" spc="1" kern="0">
                 <a:solidFill>
                   <a:srgbClr val="14161C"/>
                 </a:solidFill>
@@ -10472,7 +10461,7 @@
               <a:t> sáng</a:t>
             </a:r>
             <a:r>
-              <a:rPr lang="en-US" sz="6600" dirty="0" spc="-18" kern="0">
+              <a:rPr lang="en-US" sz="6900" dirty="0" spc="-20" kern="0">
                 <a:solidFill>
                   <a:srgbClr val="14161C"/>
                 </a:solidFill>
@@ -10482,7 +10471,7 @@
               </a:rPr>
               <a:t> chậm?</a:t>
             </a:r>
-            <a:endParaRPr lang="en-US" sz="6600" dirty="0"/>
+            <a:endParaRPr lang="en-US" sz="6900" dirty="0"/>
           </a:p>
         </p:txBody>
       </p:sp>
